--- a/doc/Camera ready/Poster_Template.pptx
+++ b/doc/Camera ready/Poster_Template.pptx
@@ -302,7 +302,7 @@
           <a:p>
             <a:fld id="{C900CA9C-26B1-4179-8334-D2D0C0B3B1E5}" type="datetimeFigureOut">
               <a:rPr lang="en-US" smtClean="0"/>
-              <a:t>20-Jun-26</a:t>
+              <a:t>22-Jun-26</a:t>
             </a:fld>
             <a:endParaRPr lang="en-US"/>
           </a:p>
@@ -512,7 +512,7 @@
           <a:p>
             <a:fld id="{C900CA9C-26B1-4179-8334-D2D0C0B3B1E5}" type="datetimeFigureOut">
               <a:rPr lang="en-US" smtClean="0"/>
-              <a:t>20-Jun-26</a:t>
+              <a:t>22-Jun-26</a:t>
             </a:fld>
             <a:endParaRPr lang="en-US"/>
           </a:p>
@@ -722,7 +722,7 @@
           <a:p>
             <a:fld id="{C900CA9C-26B1-4179-8334-D2D0C0B3B1E5}" type="datetimeFigureOut">
               <a:rPr lang="en-US" smtClean="0"/>
-              <a:t>20-Jun-26</a:t>
+              <a:t>22-Jun-26</a:t>
             </a:fld>
             <a:endParaRPr lang="en-US"/>
           </a:p>
@@ -998,7 +998,7 @@
           <a:p>
             <a:fld id="{C900CA9C-26B1-4179-8334-D2D0C0B3B1E5}" type="datetimeFigureOut">
               <a:rPr lang="en-US" smtClean="0"/>
-              <a:t>20-Jun-26</a:t>
+              <a:t>22-Jun-26</a:t>
             </a:fld>
             <a:endParaRPr lang="en-US"/>
           </a:p>
@@ -1268,7 +1268,7 @@
           <a:p>
             <a:fld id="{C900CA9C-26B1-4179-8334-D2D0C0B3B1E5}" type="datetimeFigureOut">
               <a:rPr lang="en-US" smtClean="0"/>
-              <a:t>20-Jun-26</a:t>
+              <a:t>22-Jun-26</a:t>
             </a:fld>
             <a:endParaRPr lang="en-US"/>
           </a:p>
@@ -1674,7 +1674,7 @@
           <a:p>
             <a:fld id="{C900CA9C-26B1-4179-8334-D2D0C0B3B1E5}" type="datetimeFigureOut">
               <a:rPr lang="en-US" smtClean="0"/>
-              <a:t>20-Jun-26</a:t>
+              <a:t>22-Jun-26</a:t>
             </a:fld>
             <a:endParaRPr lang="en-US"/>
           </a:p>
@@ -1824,7 +1824,7 @@
           <a:p>
             <a:fld id="{C900CA9C-26B1-4179-8334-D2D0C0B3B1E5}" type="datetimeFigureOut">
               <a:rPr lang="en-US" smtClean="0"/>
-              <a:t>20-Jun-26</a:t>
+              <a:t>22-Jun-26</a:t>
             </a:fld>
             <a:endParaRPr lang="en-US"/>
           </a:p>
@@ -1943,7 +1943,7 @@
           <a:p>
             <a:fld id="{C900CA9C-26B1-4179-8334-D2D0C0B3B1E5}" type="datetimeFigureOut">
               <a:rPr lang="en-US" smtClean="0"/>
-              <a:t>20-Jun-26</a:t>
+              <a:t>22-Jun-26</a:t>
             </a:fld>
             <a:endParaRPr lang="en-US"/>
           </a:p>
@@ -2253,7 +2253,7 @@
           <a:p>
             <a:fld id="{C900CA9C-26B1-4179-8334-D2D0C0B3B1E5}" type="datetimeFigureOut">
               <a:rPr lang="en-US" smtClean="0"/>
-              <a:t>20-Jun-26</a:t>
+              <a:t>22-Jun-26</a:t>
             </a:fld>
             <a:endParaRPr lang="en-US"/>
           </a:p>
@@ -2543,7 +2543,7 @@
           <a:p>
             <a:fld id="{C900CA9C-26B1-4179-8334-D2D0C0B3B1E5}" type="datetimeFigureOut">
               <a:rPr lang="en-US" smtClean="0"/>
-              <a:t>20-Jun-26</a:t>
+              <a:t>22-Jun-26</a:t>
             </a:fld>
             <a:endParaRPr lang="en-US"/>
           </a:p>
@@ -4268,6 +4268,127 @@
           </a:p>
         </p:txBody>
       </p:sp>
+      <p:sp>
+        <p:nvSpPr>
+          <p:cNvPr id="2" name="TextBox 1">
+            <a:extLst>
+              <a:ext uri="{FF2B5EF4-FFF2-40B4-BE49-F238E27FC236}">
+                <a16:creationId xmlns:a16="http://schemas.microsoft.com/office/drawing/2014/main" id="{7840D088-C8F4-12CA-3FD9-2BA96CDEDCC3}"/>
+              </a:ext>
+            </a:extLst>
+          </p:cNvPr>
+          <p:cNvSpPr txBox="1"/>
+          <p:nvPr/>
+        </p:nvSpPr>
+        <p:spPr>
+          <a:xfrm>
+            <a:off x="36271200" y="37560738"/>
+            <a:ext cx="1683538" cy="369332"/>
+          </a:xfrm>
+          <a:prstGeom prst="rect">
+            <a:avLst/>
+          </a:prstGeom>
+          <a:noFill/>
+        </p:spPr>
+        <p:txBody>
+          <a:bodyPr wrap="none" rtlCol="0">
+            <a:spAutoFit/>
+          </a:bodyPr>
+          <a:lstStyle/>
+          <a:p>
+            <a:r>
+              <a:rPr lang="en-US" dirty="0"/>
+              <a:t>Poster Number</a:t>
+            </a:r>
+          </a:p>
+        </p:txBody>
+      </p:sp>
+      <p:sp>
+        <p:nvSpPr>
+          <p:cNvPr id="4" name="TextBox 3">
+            <a:extLst>
+              <a:ext uri="{FF2B5EF4-FFF2-40B4-BE49-F238E27FC236}">
+                <a16:creationId xmlns:a16="http://schemas.microsoft.com/office/drawing/2014/main" id="{80788E8D-3AE4-324A-F0E0-42BF1DCAFD9E}"/>
+              </a:ext>
+            </a:extLst>
+          </p:cNvPr>
+          <p:cNvSpPr txBox="1"/>
+          <p:nvPr/>
+        </p:nvSpPr>
+        <p:spPr>
+          <a:xfrm>
+            <a:off x="24681179" y="37376072"/>
+            <a:ext cx="10957560" cy="553998"/>
+          </a:xfrm>
+          <a:prstGeom prst="rect">
+            <a:avLst/>
+          </a:prstGeom>
+          <a:noFill/>
+        </p:spPr>
+        <p:txBody>
+          <a:bodyPr wrap="square" rtlCol="0">
+            <a:spAutoFit/>
+          </a:bodyPr>
+          <a:lstStyle/>
+          <a:p>
+            <a:pPr algn="ctr"/>
+            <a:r>
+              <a:rPr lang="en-US" sz="3000" dirty="0">
+                <a:latin typeface="Calibri" panose="020F0502020204030204" pitchFamily="34" charset="0"/>
+                <a:ea typeface="Calibri" panose="020F0502020204030204" pitchFamily="34" charset="0"/>
+                <a:cs typeface="Calibri" panose="020F0502020204030204" pitchFamily="34" charset="0"/>
+              </a:rPr>
+              <a:t>Insert Poster Number given in the document here</a:t>
+            </a:r>
+          </a:p>
+        </p:txBody>
+      </p:sp>
+      <p:sp>
+        <p:nvSpPr>
+          <p:cNvPr id="11" name="Arrow: Right 10">
+            <a:extLst>
+              <a:ext uri="{FF2B5EF4-FFF2-40B4-BE49-F238E27FC236}">
+                <a16:creationId xmlns:a16="http://schemas.microsoft.com/office/drawing/2014/main" id="{9136A337-338B-DFEF-0A00-2E886EA16468}"/>
+              </a:ext>
+            </a:extLst>
+          </p:cNvPr>
+          <p:cNvSpPr/>
+          <p:nvPr/>
+        </p:nvSpPr>
+        <p:spPr>
+          <a:xfrm>
+            <a:off x="34207353" y="37488947"/>
+            <a:ext cx="2063847" cy="328247"/>
+          </a:xfrm>
+          <a:prstGeom prst="rightArrow">
+            <a:avLst/>
+          </a:prstGeom>
+        </p:spPr>
+        <p:style>
+          <a:lnRef idx="2">
+            <a:schemeClr val="accent1">
+              <a:shade val="15000"/>
+            </a:schemeClr>
+          </a:lnRef>
+          <a:fillRef idx="1">
+            <a:schemeClr val="accent1"/>
+          </a:fillRef>
+          <a:effectRef idx="0">
+            <a:schemeClr val="accent1"/>
+          </a:effectRef>
+          <a:fontRef idx="minor">
+            <a:schemeClr val="lt1"/>
+          </a:fontRef>
+        </p:style>
+        <p:txBody>
+          <a:bodyPr rtlCol="0" anchor="ctr"/>
+          <a:lstStyle/>
+          <a:p>
+            <a:pPr algn="ctr"/>
+            <a:endParaRPr lang="en-US"/>
+          </a:p>
+        </p:txBody>
+      </p:sp>
     </p:spTree>
     <p:extLst>
       <p:ext uri="{BB962C8B-B14F-4D97-AF65-F5344CB8AC3E}">
